--- a/마켓센싱리포트_AI혁신_기획팀.pptx
+++ b/마켓센싱리포트_AI혁신_기획팀.pptx
@@ -7360,7 +7360,7 @@
                 <a:ea typeface="SamsungOneKorean 500" panose="020B0603030303020204" pitchFamily="50" charset="-127"/>
                 <a:cs typeface="Arial" pitchFamily="34" charset="-120"/>
               </a:rPr>
-              <a:t>[10월]  시범운영</a:t>
+              <a:t>[9/18]  시범운영</a:t>
             </a:r>
             <a:endParaRPr lang="en-US" sz="2400" kern="0" spc="26" dirty="0">
               <a:gradFill>

--- a/마켓센싱리포트_AI혁신_기획팀.pptx
+++ b/마켓센싱리포트_AI혁신_기획팀.pptx
@@ -881,6 +881,10 @@
             </a:outerShdw>
           </a:effectLst>
         </p:spPr>
+        <p:txBody>
+          <a:bodyPr/>
+          <a:p/>
+        </p:txBody>
       </p:sp>
       <p:sp>
         <p:nvSpPr>
@@ -903,6 +907,10 @@
           </a:solidFill>
           <a:ln/>
         </p:spPr>
+        <p:txBody>
+          <a:bodyPr/>
+          <a:p/>
+        </p:txBody>
       </p:sp>
       <p:sp>
         <p:nvSpPr>
@@ -1261,6 +1269,10 @@
             </a:outerShdw>
           </a:effectLst>
         </p:spPr>
+        <p:txBody>
+          <a:bodyPr/>
+          <a:p/>
+        </p:txBody>
       </p:sp>
       <p:sp>
         <p:nvSpPr>
@@ -1424,6 +1436,10 @@
             </a:outerShdw>
           </a:effectLst>
         </p:spPr>
+        <p:txBody>
+          <a:bodyPr/>
+          <a:p/>
+        </p:txBody>
       </p:sp>
       <p:sp>
         <p:nvSpPr>
@@ -1757,6 +1773,10 @@
             </a:outerShdw>
           </a:effectLst>
         </p:spPr>
+        <p:txBody>
+          <a:bodyPr/>
+          <a:p/>
+        </p:txBody>
       </p:sp>
       <p:sp>
         <p:nvSpPr>
@@ -1904,6 +1924,10 @@
             </a:outerShdw>
           </a:effectLst>
         </p:spPr>
+        <p:txBody>
+          <a:bodyPr/>
+          <a:p/>
+        </p:txBody>
       </p:sp>
       <p:sp>
         <p:nvSpPr>
@@ -2051,6 +2075,10 @@
             </a:outerShdw>
           </a:effectLst>
         </p:spPr>
+        <p:txBody>
+          <a:bodyPr/>
+          <a:p/>
+        </p:txBody>
       </p:sp>
       <p:sp>
         <p:nvSpPr>
@@ -2217,6 +2245,10 @@
             </a:outerShdw>
           </a:effectLst>
         </p:spPr>
+        <p:txBody>
+          <a:bodyPr/>
+          <a:p/>
+        </p:txBody>
       </p:sp>
       <p:sp>
         <p:nvSpPr>
@@ -2364,6 +2396,10 @@
             </a:outerShdw>
           </a:effectLst>
         </p:spPr>
+        <p:txBody>
+          <a:bodyPr/>
+          <a:p/>
+        </p:txBody>
       </p:sp>
       <p:sp>
         <p:nvSpPr>
@@ -2532,6 +2568,10 @@
             </a:outerShdw>
           </a:effectLst>
         </p:spPr>
+        <p:txBody>
+          <a:bodyPr/>
+          <a:p/>
+        </p:txBody>
       </p:sp>
       <p:sp>
         <p:nvSpPr>
@@ -2736,6 +2776,10 @@
           </a:solidFill>
           <a:ln/>
         </p:spPr>
+        <p:txBody>
+          <a:bodyPr/>
+          <a:p/>
+        </p:txBody>
       </p:sp>
       <p:sp>
         <p:nvSpPr>
@@ -2848,6 +2892,10 @@
           </a:solidFill>
           <a:ln/>
         </p:spPr>
+        <p:txBody>
+          <a:bodyPr/>
+          <a:p/>
+        </p:txBody>
       </p:sp>
       <p:sp>
         <p:nvSpPr>
@@ -2963,6 +3011,10 @@
           </a:solidFill>
           <a:ln/>
         </p:spPr>
+        <p:txBody>
+          <a:bodyPr/>
+          <a:p/>
+        </p:txBody>
       </p:sp>
       <p:sp>
         <p:nvSpPr>
@@ -3075,6 +3127,10 @@
           </a:solidFill>
           <a:ln/>
         </p:spPr>
+        <p:txBody>
+          <a:bodyPr/>
+          <a:p/>
+        </p:txBody>
       </p:sp>
       <p:sp>
         <p:nvSpPr>
@@ -3190,6 +3246,10 @@
           </a:solidFill>
           <a:ln/>
         </p:spPr>
+        <p:txBody>
+          <a:bodyPr/>
+          <a:p/>
+        </p:txBody>
       </p:sp>
       <p:sp>
         <p:nvSpPr>
@@ -3300,6 +3360,10 @@
           </a:solidFill>
           <a:ln/>
         </p:spPr>
+        <p:txBody>
+          <a:bodyPr/>
+          <a:p/>
+        </p:txBody>
       </p:sp>
       <p:sp>
         <p:nvSpPr>
@@ -3329,6 +3393,10 @@
             </a:outerShdw>
           </a:effectLst>
         </p:spPr>
+        <p:txBody>
+          <a:bodyPr/>
+          <a:p/>
+        </p:txBody>
       </p:sp>
       <p:sp>
         <p:nvSpPr>
@@ -3408,7 +3476,7 @@
                 <a:ea typeface="SamsungOneKorean 500" panose="020B0603030303020204" pitchFamily="50" charset="-127"/>
                 <a:cs typeface="Arial" pitchFamily="34" charset="-120"/>
               </a:rPr>
-              <a:t>L1 수집은 자동화로 '대체', L2~L4 암묵지·다관점 </a:t>
+              <a:t>수집 계층은 자동화로 '대체', 지식·에이전트·종합 계층의 암묵지·다관점 </a:t>
             </a:r>
             <a:r>
               <a:rPr lang="en-US" sz="2800">
@@ -3500,6 +3568,10 @@
             </a:outerShdw>
           </a:effectLst>
         </p:spPr>
+        <p:txBody>
+          <a:bodyPr/>
+          <a:p/>
+        </p:txBody>
       </p:sp>
       <p:sp>
         <p:nvSpPr>
@@ -3544,7 +3616,7 @@
                 <a:ea typeface="SamsungOneKorean 500" panose="020B0603030303020204" pitchFamily="50" charset="-127"/>
                 <a:cs typeface="Arial" pitchFamily="34" charset="-120"/>
               </a:rPr>
-              <a:t>정보 </a:t>
+              <a:t>정보 수집 계층</a:t>
             </a:r>
             <a:r>
               <a:rPr lang="en-US" sz="2000" b="1">
@@ -3563,7 +3635,7 @@
                 <a:ea typeface="SamsungOneKorean 500" panose="020B0603030303020204" pitchFamily="50" charset="-127"/>
                 <a:cs typeface="Arial" pitchFamily="34" charset="-120"/>
               </a:rPr>
-              <a:t>수집 </a:t>
+              <a:t/>
             </a:r>
             <a:r>
               <a:rPr lang="en-US" sz="2000" b="1" smtClean="0">
@@ -3582,7 +3654,7 @@
                 <a:ea typeface="SamsungOneKorean 500" panose="020B0603030303020204" pitchFamily="50" charset="-127"/>
                 <a:cs typeface="Arial" pitchFamily="34" charset="-120"/>
               </a:rPr>
-              <a:t>계층 (</a:t>
+              <a:t/>
             </a:r>
             <a:r>
               <a:rPr lang="en-US" altLang="ko-KR" sz="2000" b="1" smtClean="0">
@@ -3601,7 +3673,7 @@
                 <a:ea typeface="SamsungOneKorean 500" panose="020B0603030303020204" pitchFamily="50" charset="-127"/>
                 <a:cs typeface="Arial" pitchFamily="34" charset="-120"/>
               </a:rPr>
-              <a:t>L1)</a:t>
+              <a:t/>
             </a:r>
             <a:endParaRPr lang="en-US" sz="2000" b="1" dirty="0">
               <a:gradFill>
@@ -3760,6 +3832,10 @@
             </a:outerShdw>
           </a:effectLst>
         </p:spPr>
+        <p:txBody>
+          <a:bodyPr/>
+          <a:p/>
+        </p:txBody>
       </p:sp>
       <p:sp>
         <p:nvSpPr>
@@ -3801,7 +3877,7 @@
                 <a:ea typeface="SamsungOneKorean 500" panose="020B0603030303020204" pitchFamily="50" charset="-127"/>
                 <a:cs typeface="Arial" pitchFamily="34" charset="-120"/>
               </a:rPr>
-              <a:t>지식 계층 </a:t>
+              <a:t>지식 계층</a:t>
             </a:r>
             <a:r>
               <a:rPr lang="en-US" altLang="ko-KR" sz="2000" b="1">
@@ -3820,7 +3896,7 @@
                 <a:ea typeface="SamsungOneKorean 500" panose="020B0603030303020204" pitchFamily="50" charset="-127"/>
                 <a:cs typeface="Arial" pitchFamily="34" charset="-120"/>
               </a:rPr>
-              <a:t>(</a:t>
+              <a:t/>
             </a:r>
             <a:r>
               <a:rPr lang="en-US" altLang="ko-KR" sz="2000" b="1" smtClean="0">
@@ -3839,7 +3915,7 @@
                 <a:ea typeface="SamsungOneKorean 500" panose="020B0603030303020204" pitchFamily="50" charset="-127"/>
                 <a:cs typeface="Arial" pitchFamily="34" charset="-120"/>
               </a:rPr>
-              <a:t>L2)</a:t>
+              <a:t/>
             </a:r>
             <a:endParaRPr lang="en-US" altLang="ko-KR" sz="2000" b="1">
               <a:gradFill>
@@ -3954,6 +4030,10 @@
             </a:outerShdw>
           </a:effectLst>
         </p:spPr>
+        <p:txBody>
+          <a:bodyPr/>
+          <a:p/>
+        </p:txBody>
       </p:sp>
       <p:sp>
         <p:nvSpPr>
@@ -3995,7 +4075,7 @@
                 <a:ea typeface="SamsungOneKorean 500" panose="020B0603030303020204" pitchFamily="50" charset="-127"/>
                 <a:cs typeface="Arial" pitchFamily="34" charset="-120"/>
               </a:rPr>
-              <a:t>에이전트 계층 </a:t>
+              <a:t>에이전트 계층</a:t>
             </a:r>
             <a:r>
               <a:rPr lang="en-US" altLang="ko-KR" sz="2000" b="1">
@@ -4014,7 +4094,7 @@
                 <a:ea typeface="SamsungOneKorean 500" panose="020B0603030303020204" pitchFamily="50" charset="-127"/>
                 <a:cs typeface="Arial" pitchFamily="34" charset="-120"/>
               </a:rPr>
-              <a:t>(</a:t>
+              <a:t/>
             </a:r>
             <a:r>
               <a:rPr lang="en-US" altLang="ko-KR" sz="2000" b="1" smtClean="0">
@@ -4033,7 +4113,7 @@
                 <a:ea typeface="SamsungOneKorean 500" panose="020B0603030303020204" pitchFamily="50" charset="-127"/>
                 <a:cs typeface="Arial" pitchFamily="34" charset="-120"/>
               </a:rPr>
-              <a:t>L3)</a:t>
+              <a:t/>
             </a:r>
             <a:endParaRPr lang="en-US" altLang="ko-KR" sz="2000" b="1">
               <a:gradFill>
@@ -4286,6 +4366,10 @@
             </a:outerShdw>
           </a:effectLst>
         </p:spPr>
+        <p:txBody>
+          <a:bodyPr/>
+          <a:p/>
+        </p:txBody>
       </p:sp>
       <p:sp>
         <p:nvSpPr>
@@ -4327,7 +4411,7 @@
                 <a:ea typeface="SamsungOneKorean 500" panose="020B0603030303020204" pitchFamily="50" charset="-127"/>
                 <a:cs typeface="Arial" pitchFamily="34" charset="-120"/>
               </a:rPr>
-              <a:t>종합</a:t>
+              <a:t>종합·판단 계층</a:t>
             </a:r>
             <a:r>
               <a:rPr lang="en-US" sz="2000" b="1">
@@ -4346,7 +4430,7 @@
                 <a:ea typeface="SamsungOneKorean 500" panose="020B0603030303020204" pitchFamily="50" charset="-127"/>
                 <a:cs typeface="Arial" pitchFamily="34" charset="-120"/>
               </a:rPr>
-              <a:t>·</a:t>
+              <a:t/>
             </a:r>
             <a:r>
               <a:rPr lang="en-US" sz="2000" b="1" smtClean="0">
@@ -4365,7 +4449,7 @@
                 <a:ea typeface="SamsungOneKorean 500" panose="020B0603030303020204" pitchFamily="50" charset="-127"/>
                 <a:cs typeface="Arial" pitchFamily="34" charset="-120"/>
               </a:rPr>
-              <a:t>판단 </a:t>
+              <a:t/>
             </a:r>
             <a:r>
               <a:rPr lang="en-US" altLang="ko-KR" sz="2000" b="1" smtClean="0">
@@ -4384,7 +4468,7 @@
                 <a:ea typeface="SamsungOneKorean 500" panose="020B0603030303020204" pitchFamily="50" charset="-127"/>
                 <a:cs typeface="Arial" pitchFamily="34" charset="-120"/>
               </a:rPr>
-              <a:t>(L4)</a:t>
+              <a:t/>
             </a:r>
             <a:endParaRPr lang="en-US" altLang="ko-KR" sz="2000" b="1">
               <a:gradFill>
@@ -4510,6 +4594,10 @@
             </a:outerShdw>
           </a:effectLst>
         </p:spPr>
+        <p:txBody>
+          <a:bodyPr/>
+          <a:p/>
+        </p:txBody>
       </p:sp>
       <p:sp>
         <p:nvSpPr>
@@ -4551,7 +4639,7 @@
                 <a:ea typeface="SamsungOneKorean 500" panose="020B0603030303020204" pitchFamily="50" charset="-127"/>
                 <a:cs typeface="Arial" pitchFamily="34" charset="-120"/>
               </a:rPr>
-              <a:t>학습 계층 </a:t>
+              <a:t>학습 계층</a:t>
             </a:r>
             <a:r>
               <a:rPr lang="en-US" altLang="ko-KR" sz="2000" b="1">
@@ -4570,7 +4658,7 @@
                 <a:ea typeface="SamsungOneKorean 500" panose="020B0603030303020204" pitchFamily="50" charset="-127"/>
                 <a:cs typeface="Arial" pitchFamily="34" charset="-120"/>
               </a:rPr>
-              <a:t>(</a:t>
+              <a:t/>
             </a:r>
             <a:r>
               <a:rPr lang="en-US" altLang="ko-KR" sz="2000" b="1" smtClean="0">
@@ -4589,7 +4677,7 @@
                 <a:ea typeface="SamsungOneKorean 500" panose="020B0603030303020204" pitchFamily="50" charset="-127"/>
                 <a:cs typeface="Arial" pitchFamily="34" charset="-120"/>
               </a:rPr>
-              <a:t>L5)</a:t>
+              <a:t/>
             </a:r>
             <a:endParaRPr lang="en-US" altLang="ko-KR" sz="2000" b="1">
               <a:gradFill>
@@ -4933,6 +5021,10 @@
             </a:outerShdw>
           </a:effectLst>
         </p:spPr>
+        <p:txBody>
+          <a:bodyPr/>
+          <a:p/>
+        </p:txBody>
       </p:sp>
       <p:sp>
         <p:nvSpPr>
@@ -5074,6 +5166,10 @@
             </a:outerShdw>
           </a:effectLst>
         </p:spPr>
+        <p:txBody>
+          <a:bodyPr/>
+          <a:p/>
+        </p:txBody>
       </p:sp>
       <p:grpSp>
         <p:nvGrpSpPr>
@@ -6005,6 +6101,10 @@
             </a:outerShdw>
           </a:effectLst>
         </p:spPr>
+        <p:txBody>
+          <a:bodyPr/>
+          <a:p/>
+        </p:txBody>
       </p:sp>
       <p:sp>
         <p:nvSpPr>
@@ -6153,6 +6253,10 @@
             </a:outerShdw>
           </a:effectLst>
         </p:spPr>
+        <p:txBody>
+          <a:bodyPr/>
+          <a:p/>
+        </p:txBody>
       </p:sp>
       <p:sp>
         <p:nvSpPr>
@@ -6173,6 +6277,10 @@
           </a:solidFill>
           <a:ln/>
         </p:spPr>
+        <p:txBody>
+          <a:bodyPr/>
+          <a:p/>
+        </p:txBody>
       </p:sp>
       <p:sp>
         <p:nvSpPr>
@@ -6200,6 +6308,10 @@
             </a:outerShdw>
           </a:effectLst>
         </p:spPr>
+        <p:txBody>
+          <a:bodyPr/>
+          <a:p/>
+        </p:txBody>
       </p:sp>
       <p:sp>
         <p:nvSpPr>
@@ -6315,6 +6427,10 @@
             </a:outerShdw>
           </a:effectLst>
         </p:spPr>
+        <p:txBody>
+          <a:bodyPr/>
+          <a:p/>
+        </p:txBody>
       </p:sp>
       <p:sp>
         <p:nvSpPr>
@@ -6430,6 +6546,10 @@
             </a:outerShdw>
           </a:effectLst>
         </p:spPr>
+        <p:txBody>
+          <a:bodyPr/>
+          <a:p/>
+        </p:txBody>
       </p:sp>
       <p:sp>
         <p:nvSpPr>
@@ -6545,6 +6665,10 @@
             </a:outerShdw>
           </a:effectLst>
         </p:spPr>
+        <p:txBody>
+          <a:bodyPr/>
+          <a:p/>
+        </p:txBody>
       </p:sp>
       <p:sp>
         <p:nvSpPr>
@@ -6662,6 +6786,10 @@
             </a:outerShdw>
           </a:effectLst>
         </p:spPr>
+        <p:txBody>
+          <a:bodyPr/>
+          <a:p/>
+        </p:txBody>
       </p:sp>
       <p:sp>
         <p:nvSpPr>
@@ -6736,6 +6864,10 @@
             </a:outerShdw>
           </a:effectLst>
         </p:spPr>
+        <p:txBody>
+          <a:bodyPr/>
+          <a:p/>
+        </p:txBody>
       </p:sp>
       <p:sp>
         <p:nvSpPr>
@@ -6756,6 +6888,10 @@
           </a:solidFill>
           <a:ln/>
         </p:spPr>
+        <p:txBody>
+          <a:bodyPr/>
+          <a:p/>
+        </p:txBody>
       </p:sp>
       <p:sp>
         <p:nvSpPr>
@@ -6843,6 +6979,10 @@
           </a:solidFill>
           <a:ln/>
         </p:spPr>
+        <p:txBody>
+          <a:bodyPr/>
+          <a:p/>
+        </p:txBody>
       </p:sp>
       <p:sp>
         <p:nvSpPr>
@@ -7018,6 +7158,10 @@
             </a:outerShdw>
           </a:effectLst>
         </p:spPr>
+        <p:txBody>
+          <a:bodyPr/>
+          <a:p/>
+        </p:txBody>
       </p:sp>
       <p:sp>
         <p:nvSpPr>
@@ -7038,6 +7182,10 @@
           </a:solidFill>
           <a:ln/>
         </p:spPr>
+        <p:txBody>
+          <a:bodyPr/>
+          <a:p/>
+        </p:txBody>
       </p:sp>
       <p:sp>
         <p:nvSpPr>
@@ -7123,6 +7271,10 @@
           </a:solidFill>
           <a:ln/>
         </p:spPr>
+        <p:txBody>
+          <a:bodyPr/>
+          <a:p/>
+        </p:txBody>
       </p:sp>
       <p:sp>
         <p:nvSpPr>
@@ -7298,6 +7450,10 @@
             </a:outerShdw>
           </a:effectLst>
         </p:spPr>
+        <p:txBody>
+          <a:bodyPr/>
+          <a:p/>
+        </p:txBody>
       </p:sp>
       <p:sp>
         <p:nvSpPr>
@@ -7318,6 +7474,10 @@
           </a:solidFill>
           <a:ln/>
         </p:spPr>
+        <p:txBody>
+          <a:bodyPr/>
+          <a:p/>
+        </p:txBody>
       </p:sp>
       <p:sp>
         <p:nvSpPr>
@@ -7400,6 +7560,10 @@
           </a:solidFill>
           <a:ln/>
         </p:spPr>
+        <p:txBody>
+          <a:bodyPr/>
+          <a:p/>
+        </p:txBody>
       </p:sp>
       <p:sp>
         <p:nvSpPr>
@@ -7871,6 +8035,10 @@
             </a:outerShdw>
           </a:effectLst>
         </p:spPr>
+        <p:txBody>
+          <a:bodyPr/>
+          <a:p/>
+        </p:txBody>
       </p:sp>
       <p:sp>
         <p:nvSpPr>
@@ -7893,6 +8061,10 @@
           </a:solidFill>
           <a:ln/>
         </p:spPr>
+        <p:txBody>
+          <a:bodyPr/>
+          <a:p/>
+        </p:txBody>
       </p:sp>
       <p:sp>
         <p:nvSpPr>
